--- a/kubernetes/04_networking_services.pptx
+++ b/kubernetes/04_networking_services.pptx
@@ -5,10 +5,10 @@
     <p:sldMasterId id="2147483733" r:id="rId1"/>
   </p:sldMasterIdLst>
   <p:notesMasterIdLst>
-    <p:notesMasterId r:id="rId20"/>
+    <p:notesMasterId r:id="rId21"/>
   </p:notesMasterIdLst>
   <p:handoutMasterIdLst>
-    <p:handoutMasterId r:id="rId21"/>
+    <p:handoutMasterId r:id="rId22"/>
   </p:handoutMasterIdLst>
   <p:sldIdLst>
     <p:sldId id="433" r:id="rId2"/>
@@ -27,8 +27,9 @@
     <p:sldId id="468" r:id="rId15"/>
     <p:sldId id="460" r:id="rId16"/>
     <p:sldId id="456" r:id="rId17"/>
-    <p:sldId id="451" r:id="rId18"/>
-    <p:sldId id="265" r:id="rId19"/>
+    <p:sldId id="965" r:id="rId18"/>
+    <p:sldId id="451" r:id="rId19"/>
+    <p:sldId id="265" r:id="rId20"/>
   </p:sldIdLst>
   <p:sldSz cx="12195175" cy="6858000"/>
   <p:notesSz cx="6858000" cy="9144000"/>
@@ -9770,7 +9771,43 @@
           <a:bodyPr/>
           <a:lstStyle/>
           <a:p>
-            <a:endParaRPr lang="de-DE" dirty="0"/>
+            <a:r>
+              <a:rPr lang="en-US" dirty="0"/>
+              <a:t>Kubernetes Services give you simple but powerful tools to interconnect single applications, pods and deployments. However, services are just basic network concepts, working on layer 3.</a:t>
+            </a:r>
+          </a:p>
+          <a:p>
+            <a:endParaRPr lang="en-US" dirty="0"/>
+          </a:p>
+          <a:p>
+            <a:r>
+              <a:rPr lang="en-US" dirty="0"/>
+              <a:t>If you need more powerful ways to shape and control your traffic, (like header extraction, blue/green traffic routing, circuit breaking, etc.) you will need a Service Mesh like </a:t>
+            </a:r>
+            <a:r>
+              <a:rPr lang="en-US" dirty="0" err="1"/>
+              <a:t>Istio</a:t>
+            </a:r>
+            <a:r>
+              <a:rPr lang="en-US" dirty="0"/>
+              <a:t> (https://istio</a:t>
+            </a:r>
+            <a:r>
+              <a:rPr lang="en-US"/>
+              <a:t>.io) </a:t>
+            </a:r>
+            <a:r>
+              <a:rPr lang="en-US" dirty="0"/>
+              <a:t>or </a:t>
+            </a:r>
+            <a:r>
+              <a:rPr lang="en-US" dirty="0" err="1"/>
+              <a:t>Linkerd</a:t>
+            </a:r>
+            <a:r>
+              <a:rPr lang="en-US" dirty="0"/>
+              <a:t> (https://linkerd.io).</a:t>
+            </a:r>
           </a:p>
         </p:txBody>
       </p:sp>
@@ -9801,6 +9838,91 @@
     </p:spTree>
     <p:extLst>
       <p:ext uri="{BB962C8B-B14F-4D97-AF65-F5344CB8AC3E}">
+        <p14:creationId xmlns:p14="http://schemas.microsoft.com/office/powerpoint/2010/main" val="4184360778"/>
+      </p:ext>
+    </p:extLst>
+  </p:cSld>
+  <p:clrMapOvr>
+    <a:masterClrMapping/>
+  </p:clrMapOvr>
+</p:notes>
+</file>
+
+<file path=ppt/notesSlides/notesSlide16.xml><?xml version="1.0" encoding="utf-8"?>
+<p:notes xmlns:a="http://schemas.openxmlformats.org/drawingml/2006/main" xmlns:r="http://schemas.openxmlformats.org/officeDocument/2006/relationships" xmlns:p="http://schemas.openxmlformats.org/presentationml/2006/main">
+  <p:cSld>
+    <p:spTree>
+      <p:nvGrpSpPr>
+        <p:cNvPr id="1" name=""/>
+        <p:cNvGrpSpPr/>
+        <p:nvPr/>
+      </p:nvGrpSpPr>
+      <p:grpSpPr>
+        <a:xfrm>
+          <a:off x="0" y="0"/>
+          <a:ext cx="0" cy="0"/>
+          <a:chOff x="0" y="0"/>
+          <a:chExt cx="0" cy="0"/>
+        </a:xfrm>
+      </p:grpSpPr>
+      <p:sp>
+        <p:nvSpPr>
+          <p:cNvPr id="2" name="Slide Image Placeholder 1"/>
+          <p:cNvSpPr>
+            <a:spLocks noGrp="1" noRot="1" noChangeAspect="1"/>
+          </p:cNvSpPr>
+          <p:nvPr>
+            <p:ph type="sldImg"/>
+          </p:nvPr>
+        </p:nvSpPr>
+        <p:spPr/>
+      </p:sp>
+      <p:sp>
+        <p:nvSpPr>
+          <p:cNvPr id="3" name="Notes Placeholder 2"/>
+          <p:cNvSpPr>
+            <a:spLocks noGrp="1"/>
+          </p:cNvSpPr>
+          <p:nvPr>
+            <p:ph type="body" idx="1"/>
+          </p:nvPr>
+        </p:nvSpPr>
+        <p:spPr/>
+        <p:txBody>
+          <a:bodyPr/>
+          <a:lstStyle/>
+          <a:p>
+            <a:endParaRPr lang="de-DE" dirty="0"/>
+          </a:p>
+        </p:txBody>
+      </p:sp>
+      <p:sp>
+        <p:nvSpPr>
+          <p:cNvPr id="4" name="Slide Number Placeholder 3"/>
+          <p:cNvSpPr>
+            <a:spLocks noGrp="1"/>
+          </p:cNvSpPr>
+          <p:nvPr>
+            <p:ph type="sldNum" sz="quarter" idx="10"/>
+          </p:nvPr>
+        </p:nvSpPr>
+        <p:spPr/>
+        <p:txBody>
+          <a:bodyPr/>
+          <a:lstStyle/>
+          <a:p>
+            <a:fld id="{7D8C2C35-2B8A-446E-BEC0-FD36716C29AC}" type="slidenum">
+              <a:rPr lang="de-DE" smtClean="0"/>
+              <a:pPr/>
+              <a:t>18</a:t>
+            </a:fld>
+            <a:endParaRPr lang="de-DE" dirty="0"/>
+          </a:p>
+        </p:txBody>
+      </p:sp>
+    </p:spTree>
+    <p:extLst>
+      <p:ext uri="{BB962C8B-B14F-4D97-AF65-F5344CB8AC3E}">
         <p14:creationId xmlns:p14="http://schemas.microsoft.com/office/powerpoint/2010/main" val="3704696196"/>
       </p:ext>
     </p:extLst>
@@ -9811,7 +9933,7 @@
 </p:notes>
 </file>
 
-<file path=ppt/notesSlides/notesSlide16.xml><?xml version="1.0" encoding="utf-8"?>
+<file path=ppt/notesSlides/notesSlide17.xml><?xml version="1.0" encoding="utf-8"?>
 <p:notes xmlns:a="http://schemas.openxmlformats.org/drawingml/2006/main" xmlns:r="http://schemas.openxmlformats.org/officeDocument/2006/relationships" xmlns:p="http://schemas.openxmlformats.org/presentationml/2006/main">
   <p:cSld>
     <p:spTree>
@@ -9846,7 +9968,7 @@
             <a:fld id="{7D8C2C35-2B8A-446E-BEC0-FD36716C29AC}" type="slidenum">
               <a:rPr lang="de-DE" smtClean="0"/>
               <a:pPr/>
-              <a:t>18</a:t>
+              <a:t>19</a:t>
             </a:fld>
             <a:endParaRPr lang="de-DE" dirty="0"/>
           </a:p>
@@ -11828,7 +11950,7 @@
   <p:clrMapOvr>
     <a:masterClrMapping/>
   </p:clrMapOvr>
-  <p:extLst mod="1">
+  <p:extLst>
     <p:ext uri="{DCECCB84-F9BA-43D5-87BE-67443E8EF086}">
       <p15:sldGuideLst xmlns:p15="http://schemas.microsoft.com/office/powerpoint/2012/main"/>
     </p:ext>
@@ -14735,7 +14857,7 @@
   <p:clrMapOvr>
     <a:masterClrMapping/>
   </p:clrMapOvr>
-  <p:extLst mod="1">
+  <p:extLst>
     <p:ext uri="{DCECCB84-F9BA-43D5-87BE-67443E8EF086}">
       <p15:sldGuideLst xmlns:p15="http://schemas.microsoft.com/office/powerpoint/2012/main"/>
     </p:ext>
@@ -14913,7 +15035,7 @@
   <p:clrMapOvr>
     <a:masterClrMapping/>
   </p:clrMapOvr>
-  <p:extLst mod="1">
+  <p:extLst>
     <p:ext uri="{DCECCB84-F9BA-43D5-87BE-67443E8EF086}">
       <p15:sldGuideLst xmlns:p15="http://schemas.microsoft.com/office/powerpoint/2012/main"/>
     </p:ext>
@@ -16896,7 +17018,7 @@
   <p:clrMapOvr>
     <a:masterClrMapping/>
   </p:clrMapOvr>
-  <p:extLst mod="1">
+  <p:extLst>
     <p:ext uri="{DCECCB84-F9BA-43D5-87BE-67443E8EF086}">
       <p15:sldGuideLst xmlns:p15="http://schemas.microsoft.com/office/powerpoint/2012/main"/>
     </p:ext>
@@ -17322,7 +17444,7 @@
   <p:clrMapOvr>
     <a:masterClrMapping/>
   </p:clrMapOvr>
-  <p:extLst mod="1">
+  <p:extLst>
     <p:ext uri="{DCECCB84-F9BA-43D5-87BE-67443E8EF086}">
       <p15:sldGuideLst xmlns:p15="http://schemas.microsoft.com/office/powerpoint/2012/main"/>
     </p:ext>
@@ -18680,7 +18802,7 @@
       </a:lvl9pPr>
     </p:otherStyle>
   </p:txStyles>
-  <p:extLst mod="1">
+  <p:extLst>
     <p:ext uri="{27BBF7A9-308A-43DC-89C8-2F10F3537804}">
       <p15:sldGuideLst xmlns:p15="http://schemas.microsoft.com/office/powerpoint/2012/main"/>
     </p:ext>
@@ -26944,6 +27066,140 @@
           <a:chExt cx="0" cy="0"/>
         </a:xfrm>
       </p:grpSpPr>
+      <p:grpSp>
+        <p:nvGrpSpPr>
+          <p:cNvPr id="6" name="Group 5">
+            <a:extLst>
+              <a:ext uri="{FF2B5EF4-FFF2-40B4-BE49-F238E27FC236}">
+                <a16:creationId xmlns:a16="http://schemas.microsoft.com/office/drawing/2014/main" id="{C7384797-07D4-4E02-8E17-ED9776D5740E}"/>
+              </a:ext>
+            </a:extLst>
+          </p:cNvPr>
+          <p:cNvGrpSpPr/>
+          <p:nvPr/>
+        </p:nvGrpSpPr>
+        <p:grpSpPr>
+          <a:xfrm>
+            <a:off x="2048369" y="806458"/>
+            <a:ext cx="7703337" cy="5337048"/>
+            <a:chOff x="2071087" y="755342"/>
+            <a:chExt cx="7703337" cy="5337048"/>
+          </a:xfrm>
+        </p:grpSpPr>
+        <p:pic>
+          <p:nvPicPr>
+            <p:cNvPr id="4" name="Picture 3" descr="A close up of text on a black background&#10;&#10;Description automatically generated">
+              <a:extLst>
+                <a:ext uri="{FF2B5EF4-FFF2-40B4-BE49-F238E27FC236}">
+                  <a16:creationId xmlns:a16="http://schemas.microsoft.com/office/drawing/2014/main" id="{BDAD9F8B-8242-4571-B481-D2550778D947}"/>
+                </a:ext>
+              </a:extLst>
+            </p:cNvPr>
+            <p:cNvPicPr>
+              <a:picLocks noChangeAspect="1"/>
+            </p:cNvPicPr>
+            <p:nvPr/>
+          </p:nvPicPr>
+          <p:blipFill>
+            <a:blip r:embed="rId3"/>
+            <a:stretch>
+              <a:fillRect/>
+            </a:stretch>
+          </p:blipFill>
+          <p:spPr>
+            <a:xfrm>
+              <a:off x="2071087" y="755342"/>
+              <a:ext cx="7703337" cy="5337048"/>
+            </a:xfrm>
+            <a:prstGeom prst="rect">
+              <a:avLst/>
+            </a:prstGeom>
+          </p:spPr>
+        </p:pic>
+        <p:sp>
+          <p:nvSpPr>
+            <p:cNvPr id="5" name="Rectangle 4"/>
+            <p:cNvSpPr/>
+            <p:nvPr/>
+          </p:nvSpPr>
+          <p:spPr>
+            <a:xfrm>
+              <a:off x="2205071" y="5784613"/>
+              <a:ext cx="3717684" cy="307777"/>
+            </a:xfrm>
+            <a:prstGeom prst="rect">
+              <a:avLst/>
+            </a:prstGeom>
+          </p:spPr>
+          <p:txBody>
+            <a:bodyPr wrap="none">
+              <a:spAutoFit/>
+            </a:bodyPr>
+            <a:lstStyle/>
+            <a:p>
+              <a:r>
+                <a:rPr lang="en-US" sz="1400" dirty="0">
+                  <a:hlinkClick r:id="rId4"/>
+                </a:rPr>
+                <a:t>https://sebiwi.github.io/comics/service-mesh/</a:t>
+              </a:r>
+              <a:endParaRPr lang="en-US" sz="1400" dirty="0"/>
+            </a:p>
+          </p:txBody>
+        </p:sp>
+      </p:grpSp>
+      <p:sp>
+        <p:nvSpPr>
+          <p:cNvPr id="3" name="Title 2"/>
+          <p:cNvSpPr>
+            <a:spLocks noGrp="1"/>
+          </p:cNvSpPr>
+          <p:nvPr>
+            <p:ph type="title"/>
+          </p:nvPr>
+        </p:nvSpPr>
+        <p:spPr/>
+        <p:txBody>
+          <a:bodyPr/>
+          <a:lstStyle/>
+          <a:p>
+            <a:r>
+              <a:rPr lang="en-US" dirty="0"/>
+              <a:t>More sophisticated networking…</a:t>
+            </a:r>
+          </a:p>
+        </p:txBody>
+      </p:sp>
+    </p:spTree>
+    <p:extLst>
+      <p:ext uri="{BB962C8B-B14F-4D97-AF65-F5344CB8AC3E}">
+        <p14:creationId xmlns:p14="http://schemas.microsoft.com/office/powerpoint/2010/main" val="1116108270"/>
+      </p:ext>
+    </p:extLst>
+  </p:cSld>
+  <p:clrMapOvr>
+    <a:masterClrMapping/>
+  </p:clrMapOvr>
+</p:sld>
+</file>
+
+<file path=ppt/slides/slide18.xml><?xml version="1.0" encoding="utf-8"?>
+<p:sld xmlns:a="http://schemas.openxmlformats.org/drawingml/2006/main" xmlns:r="http://schemas.openxmlformats.org/officeDocument/2006/relationships" xmlns:p="http://schemas.openxmlformats.org/presentationml/2006/main">
+  <p:cSld>
+    <p:spTree>
+      <p:nvGrpSpPr>
+        <p:cNvPr id="1" name=""/>
+        <p:cNvGrpSpPr/>
+        <p:nvPr/>
+      </p:nvGrpSpPr>
+      <p:grpSpPr>
+        <a:xfrm>
+          <a:off x="0" y="0"/>
+          <a:ext cx="0" cy="0"/>
+          <a:chOff x="0" y="0"/>
+          <a:chExt cx="0" cy="0"/>
+        </a:xfrm>
+      </p:grpSpPr>
       <p:sp>
         <p:nvSpPr>
           <p:cNvPr id="3" name="Title 2"/>
@@ -27853,7 +28109,7 @@
 </p:sld>
 </file>
 
-<file path=ppt/slides/slide18.xml><?xml version="1.0" encoding="utf-8"?>
+<file path=ppt/slides/slide19.xml><?xml version="1.0" encoding="utf-8"?>
 <p:sld xmlns:a="http://schemas.openxmlformats.org/drawingml/2006/main" xmlns:r="http://schemas.openxmlformats.org/officeDocument/2006/relationships" xmlns:p="http://schemas.openxmlformats.org/presentationml/2006/main" show="0">
   <p:cSld>
     <p:spTree>
